--- a/Foundation_F3/Workshop/F3-W03_Apply_Workshop_L05-L06_Our_New_Kitchen.pptx
+++ b/Foundation_F3/Workshop/F3-W03_Apply_Workshop_L05-L06_Our_New_Kitchen.pptx
@@ -7436,7 +7436,7 @@
                 <a:latin typeface="Calibri" pitchFamily="34" charset="0"/>
                 <a:cs typeface="Amiri" pitchFamily="2" charset="-78"/>
               </a:rPr>
-              <a:t>Odd numbers come from F3-L05, even numbers from F3-L06. Core: a full sentence from the starter. Develop: add the “more” part. Stretch: link two answers with </a:t>
+              <a:t>Odd numbers come from F3-L05, even numbers from F3-L06. Core: a full sentence from the starter. Develop: add the “more” part. Stretch: link two answers with ‏</a:t>
             </a:r>
             <a:pPr algn="l" indent="0" marL="0">
               <a:buNone/>
@@ -7463,7 +7463,7 @@
                 <a:latin typeface="Calibri" pitchFamily="34" charset="0"/>
                 <a:cs typeface="Amiri" pitchFamily="2" charset="-78"/>
               </a:rPr>
-              <a:t>, </a:t>
+              <a:t>‏, ‏</a:t>
             </a:r>
             <a:pPr algn="l" indent="0" marL="0">
               <a:buNone/>
@@ -7490,7 +7490,7 @@
                 <a:latin typeface="Calibri" pitchFamily="34" charset="0"/>
                 <a:cs typeface="Amiri" pitchFamily="2" charset="-78"/>
               </a:rPr>
-              <a:t> or </a:t>
+              <a:t>‏ or ‏</a:t>
             </a:r>
             <a:pPr algn="l" indent="0" marL="0">
               <a:buNone/>
@@ -7517,7 +7517,7 @@
                 <a:latin typeface="Calibri" pitchFamily="34" charset="0"/>
                 <a:cs typeface="Amiri" pitchFamily="2" charset="-78"/>
               </a:rPr>
-              <a:t>. Swap after each question.</a:t>
+              <a:t>‏. Swap after each question.</a:t>
             </a:r>
             <a:endParaRPr lang="en-US" sz="1100" dirty="0"/>
           </a:p>
@@ -10840,7 +10840,7 @@
                 <a:latin typeface="Calibri" pitchFamily="34" charset="0"/>
                 <a:cs typeface="Amiri" pitchFamily="2" charset="-78"/>
               </a:rPr>
-              <a:t>Add use and frequency: </a:t>
+              <a:t>Add use and frequency: ‏</a:t>
             </a:r>
             <a:pPr algn="l" indent="0" marL="0">
               <a:buNone/>
@@ -10921,7 +10921,7 @@
                 <a:latin typeface="Calibri" pitchFamily="34" charset="0"/>
                 <a:cs typeface="Amiri" pitchFamily="2" charset="-78"/>
               </a:rPr>
-              <a:t>.</a:t>
+              <a:t>‏.</a:t>
             </a:r>
             <a:endParaRPr lang="en-US" sz="1150" dirty="0"/>
           </a:p>
@@ -11058,7 +11058,7 @@
                 <a:latin typeface="Calibri" pitchFamily="34" charset="0"/>
                 <a:cs typeface="Amiri" pitchFamily="2" charset="-78"/>
               </a:rPr>
-              <a:t>Add a shade (</a:t>
+              <a:t>Add a shade (‏</a:t>
             </a:r>
             <a:pPr algn="l" indent="0" marL="0">
               <a:buNone/>
@@ -11085,7 +11085,7 @@
                 <a:latin typeface="Calibri" pitchFamily="34" charset="0"/>
                 <a:cs typeface="Amiri" pitchFamily="2" charset="-78"/>
               </a:rPr>
-              <a:t>) and your opinion of housework with a reason.</a:t>
+              <a:t>‏) and your opinion of housework with a reason.</a:t>
             </a:r>
             <a:endParaRPr lang="en-US" sz="1150" dirty="0"/>
           </a:p>
@@ -17452,6 +17452,19 @@
               <a:buNone/>
             </a:pPr>
             <a:r>
+              <a:rPr lang="en-US" sz="1150" b="1" dirty="0">
+                <a:solidFill>
+                  <a:srgbClr val="1B3B6F"/>
+                </a:solidFill>
+                <a:latin typeface="Calibri" pitchFamily="34" charset="0"/>
+                <a:cs typeface="Amiri" pitchFamily="2" charset="-78"/>
+              </a:rPr>
+              <a:t>‏</a:t>
+            </a:r>
+            <a:pPr algn="l" indent="0" marL="0">
+              <a:buNone/>
+            </a:pPr>
+            <a:r>
               <a:rPr lang="ar-SA" altLang="en-US" sz="1500" b="1" dirty="0">
                 <a:solidFill>
                   <a:srgbClr val="1B3B6F"/>
@@ -17473,7 +17486,7 @@
                 <a:latin typeface="Calibri" pitchFamily="34" charset="0"/>
                 <a:cs typeface="Amiri" pitchFamily="2" charset="-78"/>
               </a:rPr>
-              <a:t> → </a:t>
+              <a:t>‏ → ‏</a:t>
             </a:r>
             <a:pPr algn="l" indent="0" marL="0">
               <a:buNone/>
@@ -17500,7 +17513,7 @@
                 <a:latin typeface="Calibri" pitchFamily="34" charset="0"/>
                 <a:cs typeface="Amiri" pitchFamily="2" charset="-78"/>
               </a:rPr>
-              <a:t> for a feminine noun.</a:t>
+              <a:t>‏ for a feminine noun.</a:t>
             </a:r>
             <a:endParaRPr lang="en-US" sz="1150" dirty="0"/>
           </a:p>
@@ -17711,7 +17724,7 @@
                 <a:latin typeface="Calibri" pitchFamily="34" charset="0"/>
                 <a:cs typeface="Amiri" pitchFamily="2" charset="-78"/>
               </a:rPr>
-              <a:t>She → ta-: </a:t>
+              <a:t>She → ta-: ‏</a:t>
             </a:r>
             <a:pPr algn="l" indent="0" marL="0">
               <a:buNone/>
@@ -17738,7 +17751,7 @@
                 <a:latin typeface="Calibri" pitchFamily="34" charset="0"/>
                 <a:cs typeface="Amiri" pitchFamily="2" charset="-78"/>
               </a:rPr>
-              <a:t>.</a:t>
+              <a:t>‏.</a:t>
             </a:r>
             <a:endParaRPr lang="en-US" sz="1150" dirty="0"/>
           </a:p>
@@ -20072,7 +20085,7 @@
                 <a:latin typeface="Calibri" pitchFamily="34" charset="0"/>
                 <a:cs typeface="Amiri" pitchFamily="2" charset="-78"/>
               </a:rPr>
-              <a:t>☐  At least one </a:t>
+              <a:t>☐  At least one ‏</a:t>
             </a:r>
             <a:pPr algn="l" indent="0" marL="0">
               <a:buNone/>
@@ -20099,7 +20112,7 @@
                 <a:latin typeface="Calibri" pitchFamily="34" charset="0"/>
                 <a:cs typeface="Amiri" pitchFamily="2" charset="-78"/>
               </a:rPr>
-              <a:t> and one </a:t>
+              <a:t>‏ and one ‏</a:t>
             </a:r>
             <a:pPr algn="l" indent="0" marL="0">
               <a:buNone/>
@@ -20126,7 +20139,7 @@
                 <a:latin typeface="Calibri" pitchFamily="34" charset="0"/>
                 <a:cs typeface="Amiri" pitchFamily="2" charset="-78"/>
               </a:rPr>
-              <a:t> (Develop).</a:t>
+              <a:t>‏ (Develop).</a:t>
             </a:r>
             <a:endParaRPr lang="en-US" sz="1200" dirty="0"/>
           </a:p>
@@ -23674,7 +23687,7 @@
                 <a:latin typeface="Calibri" pitchFamily="34" charset="0"/>
                 <a:cs typeface="Amiri" pitchFamily="2" charset="-78"/>
               </a:rPr>
-              <a:t>add how often (</a:t>
+              <a:t>add how often (‏</a:t>
             </a:r>
             <a:pPr algn="l" indent="0" marL="0">
               <a:buNone/>
@@ -23728,7 +23741,7 @@
                 <a:latin typeface="Calibri" pitchFamily="34" charset="0"/>
                 <a:cs typeface="Amiri" pitchFamily="2" charset="-78"/>
               </a:rPr>
-              <a:t>)?</a:t>
+              <a:t>‏)?</a:t>
             </a:r>
             <a:endParaRPr lang="en-US" sz="1100" dirty="0"/>
           </a:p>
@@ -23887,7 +23900,7 @@
                 <a:latin typeface="Calibri" pitchFamily="34" charset="0"/>
                 <a:cs typeface="Amiri" pitchFamily="2" charset="-78"/>
               </a:rPr>
-              <a:t>use linking words (</a:t>
+              <a:t>use linking words (‏</a:t>
             </a:r>
             <a:pPr algn="l" indent="0" marL="0">
               <a:buNone/>
@@ -23995,7 +24008,7 @@
                 <a:latin typeface="Calibri" pitchFamily="34" charset="0"/>
                 <a:cs typeface="Amiri" pitchFamily="2" charset="-78"/>
               </a:rPr>
-              <a:t>)?</a:t>
+              <a:t>‏)?</a:t>
             </a:r>
             <a:endParaRPr lang="en-US" sz="1100" dirty="0"/>
           </a:p>
@@ -27941,7 +27954,7 @@
                 <a:latin typeface="Calibri" pitchFamily="34" charset="0"/>
                 <a:cs typeface="Amiri" pitchFamily="2" charset="-78"/>
               </a:rPr>
-              <a:t>I added reasons (</a:t>
+              <a:t>I added reasons (‏</a:t>
             </a:r>
             <a:pPr algn="l" indent="0" marL="0">
               <a:buNone/>
@@ -27968,7 +27981,7 @@
                 <a:latin typeface="Calibri" pitchFamily="34" charset="0"/>
                 <a:cs typeface="Amiri" pitchFamily="2" charset="-78"/>
               </a:rPr>
-              <a:t>) and extra details without frames.</a:t>
+              <a:t>‏) and extra details without frames.</a:t>
             </a:r>
             <a:endParaRPr lang="en-US" sz="1300" dirty="0"/>
           </a:p>
@@ -32096,7 +32109,7 @@
                 <a:latin typeface="Calibri" pitchFamily="34" charset="0"/>
                 <a:cs typeface="Amiri" pitchFamily="2" charset="-78"/>
               </a:rPr>
-              <a:t>☐  Add a reason (</a:t>
+              <a:t>☐  Add a reason (‏</a:t>
             </a:r>
             <a:pPr algn="l" indent="0" marL="0">
               <a:buNone/>
@@ -32123,7 +32136,7 @@
                 <a:latin typeface="Calibri" pitchFamily="34" charset="0"/>
                 <a:cs typeface="Amiri" pitchFamily="2" charset="-78"/>
               </a:rPr>
-              <a:t>) and an extra detail to every point.</a:t>
+              <a:t>‏) and an extra detail to every point.</a:t>
             </a:r>
             <a:endParaRPr lang="en-US" sz="1300" dirty="0"/>
           </a:p>
@@ -33644,7 +33657,7 @@
                 <a:latin typeface="Calibri" pitchFamily="34" charset="0"/>
                 <a:cs typeface="Amiri" pitchFamily="2" charset="-78"/>
               </a:rPr>
-              <a:t>Join a word from each lesson in one sentence with </a:t>
+              <a:t>Join a word from each lesson in one sentence with ‏</a:t>
             </a:r>
             <a:pPr algn="l" indent="0" marL="0">
               <a:buNone/>
@@ -33671,7 +33684,7 @@
                 <a:latin typeface="Calibri" pitchFamily="34" charset="0"/>
                 <a:cs typeface="Amiri" pitchFamily="2" charset="-78"/>
               </a:rPr>
-              <a:t> or </a:t>
+              <a:t>‏ or ‏</a:t>
             </a:r>
             <a:pPr algn="l" indent="0" marL="0">
               <a:buNone/>
@@ -33698,7 +33711,7 @@
                 <a:latin typeface="Calibri" pitchFamily="34" charset="0"/>
                 <a:cs typeface="Amiri" pitchFamily="2" charset="-78"/>
               </a:rPr>
-              <a:t>.</a:t>
+              <a:t>‏.</a:t>
             </a:r>
             <a:endParaRPr lang="en-US" sz="1150" dirty="0"/>
           </a:p>
